--- a/docs/Cash_Book_Project_Report.pptx
+++ b/docs/Cash_Book_Project_Report.pptx
@@ -13023,7 +13023,7 @@
       </p:sp>
       <p:pic>
         <p:nvPicPr>
-          <p:cNvPr id="4" name="Image 0" descr="preencoded.png"/>
+          <p:cNvPr id="4" name="Image 0"/>
           <p:cNvPicPr>
             <a:picLocks noChangeAspect="1"/>
           </p:cNvPicPr>
@@ -13036,8 +13036,8 @@
         </p:blipFill>
         <p:spPr>
           <a:xfrm>
-            <a:off x="822960" y="1143000"/>
-            <a:ext cx="4709160" cy="3337560"/>
+            <a:off x="822960" y="1234440"/>
+            <a:ext cx="4709160" cy="3200400"/>
           </a:xfrm>
           <a:prstGeom prst="rect">
             <a:avLst/>
@@ -13336,7 +13336,7 @@
       </p:sp>
       <p:pic>
         <p:nvPicPr>
-          <p:cNvPr id="4" name="Image 0" descr="preencoded.png"/>
+          <p:cNvPr id="4" name="Image 0"/>
           <p:cNvPicPr>
             <a:picLocks noChangeAspect="1"/>
           </p:cNvPicPr>
@@ -13349,8 +13349,8 @@
         </p:blipFill>
         <p:spPr>
           <a:xfrm>
-            <a:off x="822960" y="1143000"/>
-            <a:ext cx="4709160" cy="3337560"/>
+            <a:off x="822960" y="1234440"/>
+            <a:ext cx="4709160" cy="3200400"/>
           </a:xfrm>
           <a:prstGeom prst="rect">
             <a:avLst/>
@@ -16189,7 +16189,7 @@
       </p:sp>
       <p:pic>
         <p:nvPicPr>
-          <p:cNvPr id="4" name="Image 0" descr="preencoded.png"/>
+          <p:cNvPr id="4" name="Image 0"/>
           <p:cNvPicPr>
             <a:picLocks noChangeAspect="1"/>
           </p:cNvPicPr>
@@ -16202,8 +16202,8 @@
         </p:blipFill>
         <p:spPr>
           <a:xfrm>
-            <a:off x="822960" y="1143000"/>
-            <a:ext cx="4709160" cy="3337560"/>
+            <a:off x="822960" y="1234440"/>
+            <a:ext cx="4709160" cy="3200400"/>
           </a:xfrm>
           <a:prstGeom prst="rect">
             <a:avLst/>
@@ -17128,7 +17128,7 @@
       </p:sp>
       <p:pic>
         <p:nvPicPr>
-          <p:cNvPr id="4" name="Image 0" descr="preencoded.png"/>
+          <p:cNvPr id="4" name="Image 0"/>
           <p:cNvPicPr>
             <a:picLocks noChangeAspect="1"/>
           </p:cNvPicPr>
@@ -17141,8 +17141,8 @@
         </p:blipFill>
         <p:spPr>
           <a:xfrm>
-            <a:off x="822960" y="1143000"/>
-            <a:ext cx="4709160" cy="3337560"/>
+            <a:off x="822960" y="1240925"/>
+            <a:ext cx="4709160" cy="3123551"/>
           </a:xfrm>
           <a:prstGeom prst="rect">
             <a:avLst/>
@@ -17441,7 +17441,7 @@
       </p:sp>
       <p:pic>
         <p:nvPicPr>
-          <p:cNvPr id="4" name="Image 0" descr="preencoded.png"/>
+          <p:cNvPr id="4" name="Image 0"/>
           <p:cNvPicPr>
             <a:picLocks noChangeAspect="1"/>
           </p:cNvPicPr>
@@ -17454,8 +17454,8 @@
         </p:blipFill>
         <p:spPr>
           <a:xfrm>
-            <a:off x="822960" y="1143000"/>
-            <a:ext cx="4709160" cy="3337560"/>
+            <a:off x="822960" y="1240925"/>
+            <a:ext cx="4709160" cy="3200400"/>
           </a:xfrm>
           <a:prstGeom prst="rect">
             <a:avLst/>
@@ -17767,8 +17767,8 @@
         </p:blipFill>
         <p:spPr>
           <a:xfrm>
-            <a:off x="822960" y="1173804"/>
-            <a:ext cx="4709160" cy="3261036"/>
+            <a:off x="822960" y="1234440"/>
+            <a:ext cx="4709160" cy="3149491"/>
           </a:xfrm>
           <a:prstGeom prst="rect">
             <a:avLst/>
@@ -18067,7 +18067,7 @@
       </p:sp>
       <p:pic>
         <p:nvPicPr>
-          <p:cNvPr id="4" name="Image 0" descr="preencoded.png"/>
+          <p:cNvPr id="4" name="Image 0"/>
           <p:cNvPicPr>
             <a:picLocks noChangeAspect="1"/>
           </p:cNvPicPr>
@@ -18080,8 +18080,8 @@
         </p:blipFill>
         <p:spPr>
           <a:xfrm>
-            <a:off x="822960" y="1143000"/>
-            <a:ext cx="4709160" cy="3337560"/>
+            <a:off x="822960" y="1234440"/>
+            <a:ext cx="4709160" cy="3200400"/>
           </a:xfrm>
           <a:prstGeom prst="rect">
             <a:avLst/>
@@ -19593,8 +19593,8 @@
         </p:blipFill>
         <p:spPr>
           <a:xfrm>
-            <a:off x="822960" y="1234440"/>
-            <a:ext cx="4709160" cy="3200399"/>
+            <a:off x="822960" y="1240925"/>
+            <a:ext cx="4709160" cy="3091125"/>
           </a:xfrm>
           <a:prstGeom prst="rect">
             <a:avLst/>
@@ -20206,7 +20206,7 @@
       </p:sp>
       <p:pic>
         <p:nvPicPr>
-          <p:cNvPr id="4" name="Image 0" descr="preencoded.png"/>
+          <p:cNvPr id="4" name="Image 0"/>
           <p:cNvPicPr>
             <a:picLocks noChangeAspect="1"/>
           </p:cNvPicPr>
@@ -20219,8 +20219,8 @@
         </p:blipFill>
         <p:spPr>
           <a:xfrm>
-            <a:off x="822960" y="1143000"/>
-            <a:ext cx="4709160" cy="3337560"/>
+            <a:off x="822960" y="1234440"/>
+            <a:ext cx="4709160" cy="3123551"/>
           </a:xfrm>
           <a:prstGeom prst="rect">
             <a:avLst/>
@@ -21760,6 +21760,67 @@
           </a:p>
         </p:txBody>
       </p:sp>
+      <p:pic>
+        <p:nvPicPr>
+          <p:cNvPr id="20" name="Picture 19">
+            <a:extLst>
+              <a:ext uri="{FF2B5EF4-FFF2-40B4-BE49-F238E27FC236}">
+                <a16:creationId xmlns:a16="http://schemas.microsoft.com/office/drawing/2014/main" id="{9D18C586-FD3F-57D8-01DC-76C54A98557A}"/>
+              </a:ext>
+            </a:extLst>
+          </p:cNvPr>
+          <p:cNvPicPr>
+            <a:picLocks noChangeAspect="1"/>
+          </p:cNvPicPr>
+          <p:nvPr/>
+        </p:nvPicPr>
+        <p:blipFill>
+          <a:blip r:embed="rId3"/>
+          <a:stretch>
+            <a:fillRect/>
+          </a:stretch>
+        </p:blipFill>
+        <p:spPr>
+          <a:xfrm>
+            <a:off x="914400" y="1333784"/>
+            <a:ext cx="632176" cy="632176"/>
+          </a:xfrm>
+          <a:prstGeom prst="rect">
+            <a:avLst/>
+          </a:prstGeom>
+        </p:spPr>
+      </p:pic>
+      <p:pic>
+        <p:nvPicPr>
+          <p:cNvPr id="24" name="Picture 23">
+            <a:extLst>
+              <a:ext uri="{FF2B5EF4-FFF2-40B4-BE49-F238E27FC236}">
+                <a16:creationId xmlns:a16="http://schemas.microsoft.com/office/drawing/2014/main" id="{F44E5987-9CAD-791C-9BB8-BBEB6AD7F8EB}"/>
+              </a:ext>
+            </a:extLst>
+          </p:cNvPr>
+          <p:cNvPicPr>
+            <a:picLocks noChangeAspect="1"/>
+          </p:cNvPicPr>
+          <p:nvPr/>
+        </p:nvPicPr>
+        <p:blipFill>
+          <a:blip r:embed="rId4"/>
+          <a:srcRect r="16254" b="16533"/>
+          <a:stretch>
+            <a:fillRect/>
+          </a:stretch>
+        </p:blipFill>
+        <p:spPr>
+          <a:xfrm>
+            <a:off x="4758832" y="1259732"/>
+            <a:ext cx="632176" cy="632176"/>
+          </a:xfrm>
+          <a:prstGeom prst="rect">
+            <a:avLst/>
+          </a:prstGeom>
+        </p:spPr>
+      </p:pic>
     </p:spTree>
   </p:cSld>
   <p:clrMapOvr>
@@ -22035,18 +22096,6 @@
               </a:rPr>
               <a:t>https://gemini.google.com</a:t>
             </a:r>
-            <a:endParaRPr lang="en-IN" sz="1200" dirty="0">
-              <a:solidFill>
-                <a:schemeClr val="accent1"/>
-              </a:solidFill>
-              <a:hlinkClick r:id="rId8">
-                <a:extLst>
-                  <a:ext uri="{A12FA001-AC4F-418D-AE19-62706E023703}">
-                    <ahyp:hlinkClr xmlns:ahyp="http://schemas.microsoft.com/office/drawing/2018/hyperlinkcolor" val="tx"/>
-                  </a:ext>
-                </a:extLst>
-              </a:hlinkClick>
-            </a:endParaRPr>
           </a:p>
           <a:p>
             <a:pPr marL="0" indent="0">
@@ -25257,18 +25306,7 @@
                 <a:ea typeface="Segoe UI" pitchFamily="34" charset="-122"/>
                 <a:cs typeface="Segoe UI" pitchFamily="34" charset="-120"/>
               </a:rPr>
-              <a:t>Main Menu: Unlocks Dashboard, Transactions, Party Ledger, Receipts, </a:t>
-            </a:r>
-            <a:r>
-              <a:rPr lang="en-US" sz="1000">
-                <a:solidFill>
-                  <a:srgbClr val="1E293B"/>
-                </a:solidFill>
-                <a:latin typeface="Segoe UI" pitchFamily="34" charset="0"/>
-                <a:ea typeface="Segoe UI" pitchFamily="34" charset="-122"/>
-                <a:cs typeface="Segoe UI" pitchFamily="34" charset="-120"/>
-              </a:rPr>
-              <a:t>Settings.</a:t>
+              <a:t>Main Menu: Unlocks Dashboard, Transactions, Party Ledger, Receipts, Settings.</a:t>
             </a:r>
           </a:p>
           <a:p>

--- a/docs/Cash_Book_Project_Report.pptx
+++ b/docs/Cash_Book_Project_Report.pptx
@@ -4187,7 +4187,7 @@
               <a:buNone/>
             </a:pPr>
             <a:r>
-              <a:rPr lang="en-US" sz="1400" b="1" dirty="0">
+              <a:rPr lang="en-US" sz="1400" b="1">
                 <a:solidFill>
                   <a:srgbClr val="0F172A"/>
                 </a:solidFill>
@@ -4195,7 +4195,18 @@
                 <a:ea typeface="Segoe UI" pitchFamily="34" charset="-122"/>
                 <a:cs typeface="Segoe UI" pitchFamily="34" charset="-120"/>
               </a:rPr>
-              <a:t>Sanskruti Ramani
+              <a:t>Prof. Sanskruti </a:t>
+            </a:r>
+            <a:r>
+              <a:rPr lang="en-US" sz="1400" b="1" dirty="0">
+                <a:solidFill>
+                  <a:srgbClr val="0F172A"/>
+                </a:solidFill>
+                <a:latin typeface="Segoe UI" pitchFamily="34" charset="0"/>
+                <a:ea typeface="Segoe UI" pitchFamily="34" charset="-122"/>
+                <a:cs typeface="Segoe UI" pitchFamily="34" charset="-120"/>
+              </a:rPr>
+              <a:t>Ramani
 </a:t>
             </a:r>
             <a:r>
@@ -4475,7 +4486,7 @@
       </p:sp>
       <p:pic>
         <p:nvPicPr>
-          <p:cNvPr id="4" name="Image 0" descr="preencoded.png"/>
+          <p:cNvPr id="4" name="Image 0"/>
           <p:cNvPicPr>
             <a:picLocks noChangeAspect="1"/>
           </p:cNvPicPr>
@@ -4488,8 +4499,8 @@
         </p:blipFill>
         <p:spPr>
           <a:xfrm>
-            <a:off x="822960" y="1143000"/>
-            <a:ext cx="4983480" cy="3337560"/>
+            <a:off x="822960" y="1227956"/>
+            <a:ext cx="4983480" cy="3154680"/>
           </a:xfrm>
           <a:prstGeom prst="rect">
             <a:avLst/>
